--- a/第二场-220336-吴成伟.pptx
+++ b/第二场-220336-吴成伟.pptx
@@ -4717,7 +4717,7 @@
                 <a:latin typeface="Microsoft YaHei" pitchFamily="34" charset="0"/>
                 <a:ea typeface="Microsoft YaHei" pitchFamily="34" charset="-122"/>
               </a:rPr>
-              <a:t>高并发稳定，多级缓存加速</a:t>
+              <a:t>高并发稳定</a:t>
             </a:r>
             <a:endParaRPr lang="en-US" sz="1050" dirty="0">
               <a:solidFill>
@@ -9967,7 +9967,7 @@
               <a:buNone/>
             </a:pPr>
             <a:r>
-              <a:rPr lang="zh-CN" altLang="en-US" sz="1200" b="1" dirty="0">
+              <a:rPr lang="zh-CN" altLang="en-US" sz="1200" b="1">
                 <a:solidFill>
                   <a:srgbClr val="000000"/>
                 </a:solidFill>
@@ -9975,18 +9975,7 @@
                 <a:ea typeface="Microsoft YaHei" pitchFamily="34" charset="-122"/>
                 <a:cs typeface="Microsoft YaHei" pitchFamily="34" charset="-120"/>
               </a:rPr>
-              <a:t>价值</a:t>
-            </a:r>
-            <a:r>
-              <a:rPr lang="en-US" sz="1200" b="1" dirty="0" err="1">
-                <a:solidFill>
-                  <a:srgbClr val="000000"/>
-                </a:solidFill>
-                <a:latin typeface="Microsoft YaHei" pitchFamily="34" charset="0"/>
-                <a:ea typeface="Microsoft YaHei" pitchFamily="34" charset="-122"/>
-                <a:cs typeface="Microsoft YaHei" pitchFamily="34" charset="-120"/>
-              </a:rPr>
-              <a:t>运维</a:t>
+              <a:t>价值维度</a:t>
             </a:r>
             <a:endParaRPr lang="en-US" sz="1200" dirty="0"/>
           </a:p>
